--- a/PPTs/bak2/Chxx_Review OLD.pptx
+++ b/PPTs/bak2/Chxx_Review OLD.pptx
@@ -5,7 +5,7 @@
     <p:sldMasterId id="2147483660" r:id="rId1"/>
   </p:sldMasterIdLst>
   <p:notesMasterIdLst>
-    <p:notesMasterId r:id="rId22"/>
+    <p:notesMasterId r:id="rId24"/>
   </p:notesMasterIdLst>
   <p:sldIdLst>
     <p:sldId id="256" r:id="rId2"/>
@@ -28,6 +28,8 @@
     <p:sldId id="306" r:id="rId19"/>
     <p:sldId id="300" r:id="rId20"/>
     <p:sldId id="283" r:id="rId21"/>
+    <p:sldId id="311" r:id="rId22"/>
+    <p:sldId id="350" r:id="rId23"/>
   </p:sldIdLst>
   <p:sldSz cx="9144000" cy="6858000" type="screen4x3"/>
   <p:notesSz cx="6858000" cy="9144000"/>
@@ -148,7 +150,7 @@
 <file path=ppt/revisionInfo.xml><?xml version="1.0" encoding="utf-8"?>
 <p1510:revInfo xmlns:a="http://schemas.openxmlformats.org/drawingml/2006/main" xmlns:r="http://schemas.openxmlformats.org/officeDocument/2006/relationships" xmlns:p1510="http://schemas.microsoft.com/office/powerpoint/2015/10/main">
   <p1510:revLst>
-    <p1510:client id="{91944384-D7F0-4718-A6BC-6EE633C599DF}" v="3" dt="2025-10-07T13:00:49.529"/>
+    <p1510:client id="{2B497099-2466-40A9-9294-3F725CA79053}" v="1" dt="2025-12-02T20:35:48.209"/>
   </p1510:revLst>
 </p1510:revInfo>
 </file>
@@ -157,242 +159,32 @@
 <pc:chgInfo xmlns:a="http://schemas.openxmlformats.org/drawingml/2006/main" xmlns:r="http://schemas.openxmlformats.org/officeDocument/2006/relationships" xmlns:ac="http://schemas.microsoft.com/office/drawing/2013/main/command" xmlns:pc="http://schemas.microsoft.com/office/powerpoint/2013/main/command">
   <pc:docChgLst>
     <pc:chgData name="Zonghua Gu" userId="9a7e1853e1951ef5" providerId="LiveId" clId="{CF1FAA12-072C-4ED5-BA76-0FFFAEFDB88A}"/>
-    <pc:docChg chg="undo custSel delSld modSld">
-      <pc:chgData name="Zonghua Gu" userId="9a7e1853e1951ef5" providerId="LiveId" clId="{CF1FAA12-072C-4ED5-BA76-0FFFAEFDB88A}" dt="2025-10-07T21:33:07.535" v="70" actId="47"/>
+    <pc:docChg chg="undo custSel addSld delSld modSld">
+      <pc:chgData name="Zonghua Gu" userId="9a7e1853e1951ef5" providerId="LiveId" clId="{CF1FAA12-072C-4ED5-BA76-0FFFAEFDB88A}" dt="2025-12-02T20:35:51.334" v="79" actId="20577"/>
       <pc:docMkLst>
         <pc:docMk/>
       </pc:docMkLst>
-      <pc:sldChg chg="addSp delSp modSp mod">
-        <pc:chgData name="Zonghua Gu" userId="9a7e1853e1951ef5" providerId="LiveId" clId="{CF1FAA12-072C-4ED5-BA76-0FFFAEFDB88A}" dt="2025-10-07T12:45:51.169" v="4"/>
+      <pc:sldChg chg="modSp new mod">
+        <pc:chgData name="Zonghua Gu" userId="9a7e1853e1951ef5" providerId="LiveId" clId="{CF1FAA12-072C-4ED5-BA76-0FFFAEFDB88A}" dt="2025-12-02T20:35:51.334" v="79" actId="20577"/>
         <pc:sldMkLst>
           <pc:docMk/>
-          <pc:sldMk cId="1683281344" sldId="256"/>
+          <pc:sldMk cId="866477390" sldId="311"/>
         </pc:sldMkLst>
-        <pc:spChg chg="del">
-          <ac:chgData name="Zonghua Gu" userId="9a7e1853e1951ef5" providerId="LiveId" clId="{CF1FAA12-072C-4ED5-BA76-0FFFAEFDB88A}" dt="2025-10-07T12:45:47.313" v="2" actId="478"/>
+        <pc:spChg chg="mod">
+          <ac:chgData name="Zonghua Gu" userId="9a7e1853e1951ef5" providerId="LiveId" clId="{CF1FAA12-072C-4ED5-BA76-0FFFAEFDB88A}" dt="2025-12-02T20:35:51.334" v="79" actId="20577"/>
           <ac:spMkLst>
             <pc:docMk/>
-            <pc:sldMk cId="1683281344" sldId="256"/>
-            <ac:spMk id="2" creationId="{00000000-0000-0000-0000-000000000000}"/>
-          </ac:spMkLst>
-        </pc:spChg>
-        <pc:spChg chg="del">
-          <ac:chgData name="Zonghua Gu" userId="9a7e1853e1951ef5" providerId="LiveId" clId="{CF1FAA12-072C-4ED5-BA76-0FFFAEFDB88A}" dt="2025-10-07T12:45:47.313" v="2" actId="478"/>
-          <ac:spMkLst>
-            <pc:docMk/>
-            <pc:sldMk cId="1683281344" sldId="256"/>
-            <ac:spMk id="3" creationId="{00000000-0000-0000-0000-000000000000}"/>
-          </ac:spMkLst>
-        </pc:spChg>
-        <pc:spChg chg="mod">
-          <ac:chgData name="Zonghua Gu" userId="9a7e1853e1951ef5" providerId="LiveId" clId="{CF1FAA12-072C-4ED5-BA76-0FFFAEFDB88A}" dt="2025-10-07T12:45:17.078" v="1" actId="6549"/>
-          <ac:spMkLst>
-            <pc:docMk/>
-            <pc:sldMk cId="1683281344" sldId="256"/>
-            <ac:spMk id="6" creationId="{00000000-0000-0000-0000-000000000000}"/>
-          </ac:spMkLst>
-        </pc:spChg>
-        <pc:spChg chg="add del mod">
-          <ac:chgData name="Zonghua Gu" userId="9a7e1853e1951ef5" providerId="LiveId" clId="{CF1FAA12-072C-4ED5-BA76-0FFFAEFDB88A}" dt="2025-10-07T12:45:50.300" v="3" actId="478"/>
-          <ac:spMkLst>
-            <pc:docMk/>
-            <pc:sldMk cId="1683281344" sldId="256"/>
-            <ac:spMk id="8" creationId="{96158B68-26B7-8932-2A0F-22F178C76003}"/>
-          </ac:spMkLst>
-        </pc:spChg>
-        <pc:spChg chg="add del mod">
-          <ac:chgData name="Zonghua Gu" userId="9a7e1853e1951ef5" providerId="LiveId" clId="{CF1FAA12-072C-4ED5-BA76-0FFFAEFDB88A}" dt="2025-10-07T12:45:50.300" v="3" actId="478"/>
-          <ac:spMkLst>
-            <pc:docMk/>
-            <pc:sldMk cId="1683281344" sldId="256"/>
-            <ac:spMk id="10" creationId="{004771AA-D394-10DF-2D2C-DF939ED8082D}"/>
-          </ac:spMkLst>
-        </pc:spChg>
-        <pc:spChg chg="add mod">
-          <ac:chgData name="Zonghua Gu" userId="9a7e1853e1951ef5" providerId="LiveId" clId="{CF1FAA12-072C-4ED5-BA76-0FFFAEFDB88A}" dt="2025-10-07T12:45:51.169" v="4"/>
-          <ac:spMkLst>
-            <pc:docMk/>
-            <pc:sldMk cId="1683281344" sldId="256"/>
-            <ac:spMk id="11" creationId="{2163272C-D316-640E-093D-C3C18C83B6A9}"/>
-          </ac:spMkLst>
-        </pc:spChg>
-        <pc:spChg chg="add mod">
-          <ac:chgData name="Zonghua Gu" userId="9a7e1853e1951ef5" providerId="LiveId" clId="{CF1FAA12-072C-4ED5-BA76-0FFFAEFDB88A}" dt="2025-10-07T12:45:51.169" v="4"/>
-          <ac:spMkLst>
-            <pc:docMk/>
-            <pc:sldMk cId="1683281344" sldId="256"/>
-            <ac:spMk id="12" creationId="{765BF85F-518B-641A-2DA2-0C9A1AE9CEAF}"/>
-          </ac:spMkLst>
-        </pc:spChg>
-        <pc:spChg chg="add mod">
-          <ac:chgData name="Zonghua Gu" userId="9a7e1853e1951ef5" providerId="LiveId" clId="{CF1FAA12-072C-4ED5-BA76-0FFFAEFDB88A}" dt="2025-10-07T12:45:51.169" v="4"/>
-          <ac:spMkLst>
-            <pc:docMk/>
-            <pc:sldMk cId="1683281344" sldId="256"/>
-            <ac:spMk id="13" creationId="{D6690234-6E61-CB44-62FA-AA0F4198F533}"/>
-          </ac:spMkLst>
-        </pc:spChg>
-        <pc:spChg chg="add mod">
-          <ac:chgData name="Zonghua Gu" userId="9a7e1853e1951ef5" providerId="LiveId" clId="{CF1FAA12-072C-4ED5-BA76-0FFFAEFDB88A}" dt="2025-10-07T12:45:51.169" v="4"/>
-          <ac:spMkLst>
-            <pc:docMk/>
-            <pc:sldMk cId="1683281344" sldId="256"/>
-            <ac:spMk id="14" creationId="{FA8E23A1-9C64-77E9-BB44-8AB19906E190}"/>
+            <pc:sldMk cId="866477390" sldId="311"/>
+            <ac:spMk id="2" creationId="{C83AFC3B-810F-6B83-C219-1D026EE21FE8}"/>
           </ac:spMkLst>
         </pc:spChg>
       </pc:sldChg>
-      <pc:sldChg chg="modSp mod">
-        <pc:chgData name="Zonghua Gu" userId="9a7e1853e1951ef5" providerId="LiveId" clId="{CF1FAA12-072C-4ED5-BA76-0FFFAEFDB88A}" dt="2025-10-07T12:46:46.540" v="14" actId="20577"/>
+      <pc:sldChg chg="add">
+        <pc:chgData name="Zonghua Gu" userId="9a7e1853e1951ef5" providerId="LiveId" clId="{CF1FAA12-072C-4ED5-BA76-0FFFAEFDB88A}" dt="2025-12-02T20:35:48.207" v="72"/>
         <pc:sldMkLst>
           <pc:docMk/>
-          <pc:sldMk cId="287378539" sldId="258"/>
+          <pc:sldMk cId="2402349904" sldId="350"/>
         </pc:sldMkLst>
-        <pc:spChg chg="mod">
-          <ac:chgData name="Zonghua Gu" userId="9a7e1853e1951ef5" providerId="LiveId" clId="{CF1FAA12-072C-4ED5-BA76-0FFFAEFDB88A}" dt="2025-10-07T12:46:46.540" v="14" actId="20577"/>
-          <ac:spMkLst>
-            <pc:docMk/>
-            <pc:sldMk cId="287378539" sldId="258"/>
-            <ac:spMk id="3" creationId="{00000000-0000-0000-0000-000000000000}"/>
-          </ac:spMkLst>
-        </pc:spChg>
-      </pc:sldChg>
-      <pc:sldChg chg="modSp mod">
-        <pc:chgData name="Zonghua Gu" userId="9a7e1853e1951ef5" providerId="LiveId" clId="{CF1FAA12-072C-4ED5-BA76-0FFFAEFDB88A}" dt="2025-10-07T13:01:49.521" v="35" actId="20577"/>
-        <pc:sldMkLst>
-          <pc:docMk/>
-          <pc:sldMk cId="3098443873" sldId="260"/>
-        </pc:sldMkLst>
-        <pc:spChg chg="mod">
-          <ac:chgData name="Zonghua Gu" userId="9a7e1853e1951ef5" providerId="LiveId" clId="{CF1FAA12-072C-4ED5-BA76-0FFFAEFDB88A}" dt="2025-10-07T13:01:49.521" v="35" actId="20577"/>
-          <ac:spMkLst>
-            <pc:docMk/>
-            <pc:sldMk cId="3098443873" sldId="260"/>
-            <ac:spMk id="3" creationId="{00000000-0000-0000-0000-000000000000}"/>
-          </ac:spMkLst>
-        </pc:spChg>
-      </pc:sldChg>
-      <pc:sldChg chg="del">
-        <pc:chgData name="Zonghua Gu" userId="9a7e1853e1951ef5" providerId="LiveId" clId="{CF1FAA12-072C-4ED5-BA76-0FFFAEFDB88A}" dt="2025-10-07T21:29:25.464" v="63" actId="47"/>
-        <pc:sldMkLst>
-          <pc:docMk/>
-          <pc:sldMk cId="3901081122" sldId="266"/>
-        </pc:sldMkLst>
-      </pc:sldChg>
-      <pc:sldChg chg="del">
-        <pc:chgData name="Zonghua Gu" userId="9a7e1853e1951ef5" providerId="LiveId" clId="{CF1FAA12-072C-4ED5-BA76-0FFFAEFDB88A}" dt="2025-10-07T21:29:27.318" v="65" actId="47"/>
-        <pc:sldMkLst>
-          <pc:docMk/>
-          <pc:sldMk cId="210484945" sldId="278"/>
-        </pc:sldMkLst>
-      </pc:sldChg>
-      <pc:sldChg chg="del">
-        <pc:chgData name="Zonghua Gu" userId="9a7e1853e1951ef5" providerId="LiveId" clId="{CF1FAA12-072C-4ED5-BA76-0FFFAEFDB88A}" dt="2025-10-07T21:29:28.111" v="66" actId="47"/>
-        <pc:sldMkLst>
-          <pc:docMk/>
-          <pc:sldMk cId="3054749938" sldId="279"/>
-        </pc:sldMkLst>
-      </pc:sldChg>
-      <pc:sldChg chg="del">
-        <pc:chgData name="Zonghua Gu" userId="9a7e1853e1951ef5" providerId="LiveId" clId="{CF1FAA12-072C-4ED5-BA76-0FFFAEFDB88A}" dt="2025-10-07T21:33:06.229" v="69" actId="47"/>
-        <pc:sldMkLst>
-          <pc:docMk/>
-          <pc:sldMk cId="3034693896" sldId="281"/>
-        </pc:sldMkLst>
-      </pc:sldChg>
-      <pc:sldChg chg="modSp mod">
-        <pc:chgData name="Zonghua Gu" userId="9a7e1853e1951ef5" providerId="LiveId" clId="{CF1FAA12-072C-4ED5-BA76-0FFFAEFDB88A}" dt="2025-10-07T21:29:55.259" v="67" actId="947"/>
-        <pc:sldMkLst>
-          <pc:docMk/>
-          <pc:sldMk cId="1623878550" sldId="283"/>
-        </pc:sldMkLst>
-        <pc:spChg chg="mod">
-          <ac:chgData name="Zonghua Gu" userId="9a7e1853e1951ef5" providerId="LiveId" clId="{CF1FAA12-072C-4ED5-BA76-0FFFAEFDB88A}" dt="2025-10-07T21:29:55.259" v="67" actId="947"/>
-          <ac:spMkLst>
-            <pc:docMk/>
-            <pc:sldMk cId="1623878550" sldId="283"/>
-            <ac:spMk id="2" creationId="{00000000-0000-0000-0000-000000000000}"/>
-          </ac:spMkLst>
-        </pc:spChg>
-      </pc:sldChg>
-      <pc:sldChg chg="addSp modSp mod">
-        <pc:chgData name="Zonghua Gu" userId="9a7e1853e1951ef5" providerId="LiveId" clId="{CF1FAA12-072C-4ED5-BA76-0FFFAEFDB88A}" dt="2025-10-07T21:28:17.077" v="59" actId="1076"/>
-        <pc:sldMkLst>
-          <pc:docMk/>
-          <pc:sldMk cId="601431910" sldId="284"/>
-        </pc:sldMkLst>
-        <pc:spChg chg="add mod">
-          <ac:chgData name="Zonghua Gu" userId="9a7e1853e1951ef5" providerId="LiveId" clId="{CF1FAA12-072C-4ED5-BA76-0FFFAEFDB88A}" dt="2025-10-07T21:28:17.077" v="59" actId="1076"/>
-          <ac:spMkLst>
-            <pc:docMk/>
-            <pc:sldMk cId="601431910" sldId="284"/>
-            <ac:spMk id="7" creationId="{91A4DE93-40B1-3CA9-1D41-3281E80C40F8}"/>
-          </ac:spMkLst>
-        </pc:spChg>
-        <pc:graphicFrameChg chg="mod">
-          <ac:chgData name="Zonghua Gu" userId="9a7e1853e1951ef5" providerId="LiveId" clId="{CF1FAA12-072C-4ED5-BA76-0FFFAEFDB88A}" dt="2025-10-07T21:27:41.041" v="46" actId="1076"/>
-          <ac:graphicFrameMkLst>
-            <pc:docMk/>
-            <pc:sldMk cId="601431910" sldId="284"/>
-            <ac:graphicFrameMk id="5" creationId="{00000000-0000-0000-0000-000000000000}"/>
-          </ac:graphicFrameMkLst>
-        </pc:graphicFrameChg>
-      </pc:sldChg>
-      <pc:sldChg chg="del">
-        <pc:chgData name="Zonghua Gu" userId="9a7e1853e1951ef5" providerId="LiveId" clId="{CF1FAA12-072C-4ED5-BA76-0FFFAEFDB88A}" dt="2025-10-07T21:28:49.131" v="60" actId="47"/>
-        <pc:sldMkLst>
-          <pc:docMk/>
-          <pc:sldMk cId="1620139945" sldId="294"/>
-        </pc:sldMkLst>
-      </pc:sldChg>
-      <pc:sldChg chg="del">
-        <pc:chgData name="Zonghua Gu" userId="9a7e1853e1951ef5" providerId="LiveId" clId="{CF1FAA12-072C-4ED5-BA76-0FFFAEFDB88A}" dt="2025-10-07T21:29:26.449" v="64" actId="47"/>
-        <pc:sldMkLst>
-          <pc:docMk/>
-          <pc:sldMk cId="3243208761" sldId="298"/>
-        </pc:sldMkLst>
-      </pc:sldChg>
-      <pc:sldChg chg="del">
-        <pc:chgData name="Zonghua Gu" userId="9a7e1853e1951ef5" providerId="LiveId" clId="{CF1FAA12-072C-4ED5-BA76-0FFFAEFDB88A}" dt="2025-10-07T21:33:05.228" v="68" actId="47"/>
-        <pc:sldMkLst>
-          <pc:docMk/>
-          <pc:sldMk cId="1895128042" sldId="299"/>
-        </pc:sldMkLst>
-      </pc:sldChg>
-      <pc:sldChg chg="del">
-        <pc:chgData name="Zonghua Gu" userId="9a7e1853e1951ef5" providerId="LiveId" clId="{CF1FAA12-072C-4ED5-BA76-0FFFAEFDB88A}" dt="2025-10-07T21:33:07.535" v="70" actId="47"/>
-        <pc:sldMkLst>
-          <pc:docMk/>
-          <pc:sldMk cId="1849241118" sldId="302"/>
-        </pc:sldMkLst>
-      </pc:sldChg>
-      <pc:sldChg chg="del">
-        <pc:chgData name="Zonghua Gu" userId="9a7e1853e1951ef5" providerId="LiveId" clId="{CF1FAA12-072C-4ED5-BA76-0FFFAEFDB88A}" dt="2025-10-07T21:29:04.496" v="61" actId="47"/>
-        <pc:sldMkLst>
-          <pc:docMk/>
-          <pc:sldMk cId="2863756120" sldId="304"/>
-        </pc:sldMkLst>
-      </pc:sldChg>
-      <pc:sldChg chg="del">
-        <pc:chgData name="Zonghua Gu" userId="9a7e1853e1951ef5" providerId="LiveId" clId="{CF1FAA12-072C-4ED5-BA76-0FFFAEFDB88A}" dt="2025-10-07T21:29:23.623" v="62" actId="47"/>
-        <pc:sldMkLst>
-          <pc:docMk/>
-          <pc:sldMk cId="3866271372" sldId="309"/>
-        </pc:sldMkLst>
-      </pc:sldChg>
-      <pc:sldChg chg="modSp mod">
-        <pc:chgData name="Zonghua Gu" userId="9a7e1853e1951ef5" providerId="LiveId" clId="{CF1FAA12-072C-4ED5-BA76-0FFFAEFDB88A}" dt="2025-10-07T13:12:46.888" v="43" actId="20577"/>
-        <pc:sldMkLst>
-          <pc:docMk/>
-          <pc:sldMk cId="3097634148" sldId="310"/>
-        </pc:sldMkLst>
-        <pc:spChg chg="mod">
-          <ac:chgData name="Zonghua Gu" userId="9a7e1853e1951ef5" providerId="LiveId" clId="{CF1FAA12-072C-4ED5-BA76-0FFFAEFDB88A}" dt="2025-10-07T13:12:46.888" v="43" actId="20577"/>
-          <ac:spMkLst>
-            <pc:docMk/>
-            <pc:sldMk cId="3097634148" sldId="310"/>
-            <ac:spMk id="2" creationId="{00000000-0000-0000-0000-000000000000}"/>
-          </ac:spMkLst>
-        </pc:spChg>
       </pc:sldChg>
     </pc:docChg>
   </pc:docChgLst>
@@ -482,7 +274,7 @@
             <a:fld id="{687A5E3F-0972-45A4-AC9E-F4F032C2257A}" type="datetimeFigureOut">
               <a:rPr lang="en-US" smtClean="0"/>
               <a:pPr/>
-              <a:t>10/7/2025</a:t>
+              <a:t>12/2/2025</a:t>
             </a:fld>
             <a:endParaRPr lang="en-US"/>
           </a:p>
@@ -1036,7 +828,7 @@
             <a:fld id="{5385DBA2-727B-43EE-B61A-7232050E756A}" type="datetime1">
               <a:rPr lang="en-US" smtClean="0"/>
               <a:pPr eaLnBrk="1" latinLnBrk="0" hangingPunct="1"/>
-              <a:t>10/7/2025</a:t>
+              <a:t>12/2/2025</a:t>
             </a:fld>
             <a:endParaRPr lang="en-US" sz="1600" dirty="0"/>
           </a:p>
@@ -1397,7 +1189,7 @@
             <a:fld id="{358F74D6-AB91-42D2-8101-D1947966E076}" type="datetime1">
               <a:rPr lang="en-US" smtClean="0"/>
               <a:pPr eaLnBrk="1" latinLnBrk="0" hangingPunct="1"/>
-              <a:t>10/7/2025</a:t>
+              <a:t>12/2/2025</a:t>
             </a:fld>
             <a:endParaRPr lang="en-US"/>
           </a:p>
@@ -1574,7 +1366,7 @@
             <a:fld id="{5BC2DAB9-8EA6-4157-980F-5E7CBF565945}" type="datetime1">
               <a:rPr lang="en-US" smtClean="0"/>
               <a:pPr eaLnBrk="1" latinLnBrk="0" hangingPunct="1"/>
-              <a:t>10/7/2025</a:t>
+              <a:t>12/2/2025</a:t>
             </a:fld>
             <a:endParaRPr lang="en-US"/>
           </a:p>
@@ -1811,7 +1603,7 @@
             <a:fld id="{FD3CB0AB-D709-47D9-B108-C72463926FD4}" type="datetime1">
               <a:rPr lang="en-US" smtClean="0"/>
               <a:pPr eaLnBrk="1" latinLnBrk="0" hangingPunct="1"/>
-              <a:t>10/7/2025</a:t>
+              <a:t>12/2/2025</a:t>
             </a:fld>
             <a:endParaRPr lang="en-US" dirty="0"/>
           </a:p>
@@ -2082,7 +1874,7 @@
             <a:fld id="{A15A26EE-9A10-4DC6-9165-C6231F65734D}" type="datetime1">
               <a:rPr lang="en-US" smtClean="0"/>
               <a:pPr eaLnBrk="1" latinLnBrk="0" hangingPunct="1"/>
-              <a:t>10/7/2025</a:t>
+              <a:t>12/2/2025</a:t>
             </a:fld>
             <a:endParaRPr lang="en-US" dirty="0"/>
           </a:p>
@@ -2304,7 +2096,7 @@
             <a:fld id="{A38F1204-C368-4730-89D0-2AA4D8D0FAB9}" type="datetime1">
               <a:rPr lang="en-US" smtClean="0"/>
               <a:pPr eaLnBrk="1" latinLnBrk="0" hangingPunct="1"/>
-              <a:t>10/7/2025</a:t>
+              <a:t>12/2/2025</a:t>
             </a:fld>
             <a:endParaRPr lang="en-US"/>
           </a:p>
@@ -2658,7 +2450,7 @@
             <a:fld id="{B9A52CCE-3D4A-4822-AB92-D51BD1732F26}" type="datetime1">
               <a:rPr lang="en-US" smtClean="0"/>
               <a:pPr eaLnBrk="1" latinLnBrk="0" hangingPunct="1"/>
-              <a:t>10/7/2025</a:t>
+              <a:t>12/2/2025</a:t>
             </a:fld>
             <a:endParaRPr lang="en-US"/>
           </a:p>
@@ -2892,7 +2684,7 @@
             <a:fld id="{FB10BC51-9A51-4195-AB26-809709A20093}" type="datetime1">
               <a:rPr lang="en-US" smtClean="0"/>
               <a:pPr eaLnBrk="1" latinLnBrk="0" hangingPunct="1"/>
-              <a:t>10/7/2025</a:t>
+              <a:t>12/2/2025</a:t>
             </a:fld>
             <a:endParaRPr lang="en-US"/>
           </a:p>
@@ -3035,7 +2827,7 @@
             <a:fld id="{F53E6368-F58E-49F3-B7B5-FC7AF9F17FE0}" type="datetime1">
               <a:rPr lang="en-US" smtClean="0"/>
               <a:pPr eaLnBrk="1" latinLnBrk="0" hangingPunct="1"/>
-              <a:t>10/7/2025</a:t>
+              <a:t>12/2/2025</a:t>
             </a:fld>
             <a:endParaRPr lang="en-US"/>
           </a:p>
@@ -3314,7 +3106,7 @@
             <a:fld id="{142A515F-6EF2-4223-93EA-CB9BA509637A}" type="datetime1">
               <a:rPr lang="en-US" smtClean="0"/>
               <a:pPr eaLnBrk="1" latinLnBrk="0" hangingPunct="1"/>
-              <a:t>10/7/2025</a:t>
+              <a:t>12/2/2025</a:t>
             </a:fld>
             <a:endParaRPr lang="en-US"/>
           </a:p>
@@ -3723,7 +3515,7 @@
             <a:fld id="{5F777A1D-A95B-4F83-8E3E-DFE663370841}" type="datetime1">
               <a:rPr lang="en-US" smtClean="0"/>
               <a:pPr eaLnBrk="1" latinLnBrk="0" hangingPunct="1"/>
-              <a:t>10/7/2025</a:t>
+              <a:t>12/2/2025</a:t>
             </a:fld>
             <a:endParaRPr lang="en-US"/>
           </a:p>
@@ -4062,7 +3854,7 @@
             <a:fld id="{EDB75FB9-5078-4BA9-9F83-227F6C9A4C15}" type="datetime1">
               <a:rPr lang="en-US" smtClean="0"/>
               <a:pPr eaLnBrk="1" latinLnBrk="0" hangingPunct="1"/>
-              <a:t>10/7/2025</a:t>
+              <a:t>12/2/2025</a:t>
             </a:fld>
             <a:endParaRPr lang="en-US" sz="1400" dirty="0">
               <a:solidFill>
@@ -15554,7 +15346,7 @@
             </p:txBody>
           </p:sp>
         </mc:Choice>
-        <mc:Fallback xmlns:mv="urn:schemas-microsoft-com:mac:vml" xmlns="">
+        <mc:Fallback xmlns="" xmlns:mv="urn:schemas-microsoft-com:mac:vml">
           <p:sp>
             <p:nvSpPr>
               <p:cNvPr id="7" name="Rectangle 6"/>
@@ -15603,6 +15395,337 @@
   <p:clrMapOvr>
     <a:masterClrMapping/>
   </p:clrMapOvr>
+</p:sld>
+</file>
+
+<file path=ppt/slides/slide21.xml><?xml version="1.0" encoding="utf-8"?>
+<p:sld xmlns:a="http://schemas.openxmlformats.org/drawingml/2006/main" xmlns:r="http://schemas.openxmlformats.org/officeDocument/2006/relationships" xmlns:p="http://schemas.openxmlformats.org/presentationml/2006/main">
+  <p:cSld>
+    <p:spTree>
+      <p:nvGrpSpPr>
+        <p:cNvPr id="1" name=""/>
+        <p:cNvGrpSpPr/>
+        <p:nvPr/>
+      </p:nvGrpSpPr>
+      <p:grpSpPr>
+        <a:xfrm>
+          <a:off x="0" y="0"/>
+          <a:ext cx="0" cy="0"/>
+          <a:chOff x="0" y="0"/>
+          <a:chExt cx="0" cy="0"/>
+        </a:xfrm>
+      </p:grpSpPr>
+      <p:sp>
+        <p:nvSpPr>
+          <p:cNvPr id="2" name="Title 1">
+            <a:extLst>
+              <a:ext uri="{FF2B5EF4-FFF2-40B4-BE49-F238E27FC236}">
+                <a16:creationId xmlns:a16="http://schemas.microsoft.com/office/drawing/2014/main" id="{C83AFC3B-810F-6B83-C219-1D026EE21FE8}"/>
+              </a:ext>
+            </a:extLst>
+          </p:cNvPr>
+          <p:cNvSpPr>
+            <a:spLocks noGrp="1"/>
+          </p:cNvSpPr>
+          <p:nvPr>
+            <p:ph type="title"/>
+          </p:nvPr>
+        </p:nvSpPr>
+        <p:spPr/>
+        <p:txBody>
+          <a:bodyPr/>
+          <a:lstStyle/>
+          <a:p>
+            <a:r>
+              <a:rPr lang="en-US"/>
+              <a:t>Deleted</a:t>
+            </a:r>
+          </a:p>
+        </p:txBody>
+      </p:sp>
+      <p:sp>
+        <p:nvSpPr>
+          <p:cNvPr id="3" name="Slide Number Placeholder 2">
+            <a:extLst>
+              <a:ext uri="{FF2B5EF4-FFF2-40B4-BE49-F238E27FC236}">
+                <a16:creationId xmlns:a16="http://schemas.microsoft.com/office/drawing/2014/main" id="{5792AC3A-4346-74F6-06FD-2650ED68EE66}"/>
+              </a:ext>
+            </a:extLst>
+          </p:cNvPr>
+          <p:cNvSpPr>
+            <a:spLocks noGrp="1"/>
+          </p:cNvSpPr>
+          <p:nvPr>
+            <p:ph type="sldNum" sz="quarter" idx="12"/>
+          </p:nvPr>
+        </p:nvSpPr>
+        <p:spPr/>
+        <p:txBody>
+          <a:bodyPr/>
+          <a:lstStyle/>
+          <a:p>
+            <a:fld id="{EA7C8D44-3667-46F6-9772-CC52308E2A7F}" type="slidenum">
+              <a:rPr kumimoji="0" lang="en-US" smtClean="0"/>
+              <a:pPr/>
+              <a:t>21</a:t>
+            </a:fld>
+            <a:endParaRPr kumimoji="0" lang="en-US" dirty="0"/>
+          </a:p>
+        </p:txBody>
+      </p:sp>
+      <p:sp>
+        <p:nvSpPr>
+          <p:cNvPr id="4" name="Content Placeholder 3">
+            <a:extLst>
+              <a:ext uri="{FF2B5EF4-FFF2-40B4-BE49-F238E27FC236}">
+                <a16:creationId xmlns:a16="http://schemas.microsoft.com/office/drawing/2014/main" id="{C9B41296-A8C8-A5B5-38FE-8360641EA1C1}"/>
+              </a:ext>
+            </a:extLst>
+          </p:cNvPr>
+          <p:cNvSpPr>
+            <a:spLocks noGrp="1"/>
+          </p:cNvSpPr>
+          <p:nvPr>
+            <p:ph sz="quarter" idx="1"/>
+          </p:nvPr>
+        </p:nvSpPr>
+        <p:spPr/>
+        <p:txBody>
+          <a:bodyPr/>
+          <a:lstStyle/>
+          <a:p>
+            <a:endParaRPr lang="en-US"/>
+          </a:p>
+        </p:txBody>
+      </p:sp>
+    </p:spTree>
+    <p:extLst>
+      <p:ext uri="{BB962C8B-B14F-4D97-AF65-F5344CB8AC3E}">
+        <p14:creationId xmlns:p14="http://schemas.microsoft.com/office/powerpoint/2010/main" val="866477390"/>
+      </p:ext>
+    </p:extLst>
+  </p:cSld>
+  <p:clrMapOvr>
+    <a:masterClrMapping/>
+  </p:clrMapOvr>
+</p:sld>
+</file>
+
+<file path=ppt/slides/slide22.xml><?xml version="1.0" encoding="utf-8"?>
+<p:sld xmlns:a="http://schemas.openxmlformats.org/drawingml/2006/main" xmlns:r="http://schemas.openxmlformats.org/officeDocument/2006/relationships" xmlns:p="http://schemas.openxmlformats.org/presentationml/2006/main">
+  <p:cSld>
+    <p:spTree>
+      <p:nvGrpSpPr>
+        <p:cNvPr id="1" name=""/>
+        <p:cNvGrpSpPr/>
+        <p:nvPr/>
+      </p:nvGrpSpPr>
+      <p:grpSpPr>
+        <a:xfrm>
+          <a:off x="0" y="0"/>
+          <a:ext cx="0" cy="0"/>
+          <a:chOff x="0" y="0"/>
+          <a:chExt cx="0" cy="0"/>
+        </a:xfrm>
+      </p:grpSpPr>
+      <p:sp>
+        <p:nvSpPr>
+          <p:cNvPr id="2" name="Title 1">
+            <a:extLst>
+              <a:ext uri="{FF2B5EF4-FFF2-40B4-BE49-F238E27FC236}">
+                <a16:creationId xmlns:a16="http://schemas.microsoft.com/office/drawing/2014/main" id="{6ABF05B7-78DB-EF53-6363-9E864217269C}"/>
+              </a:ext>
+            </a:extLst>
+          </p:cNvPr>
+          <p:cNvSpPr>
+            <a:spLocks noGrp="1"/>
+          </p:cNvSpPr>
+          <p:nvPr>
+            <p:ph type="title"/>
+          </p:nvPr>
+        </p:nvSpPr>
+        <p:spPr/>
+        <p:txBody>
+          <a:bodyPr/>
+          <a:lstStyle/>
+          <a:p>
+            <a:r>
+              <a:rPr lang="en-US" dirty="0"/>
+              <a:t>Down-counting Mode Illustration</a:t>
+            </a:r>
+          </a:p>
+        </p:txBody>
+      </p:sp>
+      <p:sp>
+        <p:nvSpPr>
+          <p:cNvPr id="3" name="Slide Number Placeholder 2">
+            <a:extLst>
+              <a:ext uri="{FF2B5EF4-FFF2-40B4-BE49-F238E27FC236}">
+                <a16:creationId xmlns:a16="http://schemas.microsoft.com/office/drawing/2014/main" id="{7CEE5651-61CB-D8BE-8B7E-4C0309F08DE5}"/>
+              </a:ext>
+            </a:extLst>
+          </p:cNvPr>
+          <p:cNvSpPr>
+            <a:spLocks noGrp="1"/>
+          </p:cNvSpPr>
+          <p:nvPr>
+            <p:ph type="sldNum" sz="quarter" idx="12"/>
+          </p:nvPr>
+        </p:nvSpPr>
+        <p:spPr/>
+        <p:txBody>
+          <a:bodyPr/>
+          <a:lstStyle/>
+          <a:p>
+            <a:fld id="{EA7C8D44-3667-46F6-9772-CC52308E2A7F}" type="slidenum">
+              <a:rPr kumimoji="0" lang="en-US" smtClean="0"/>
+              <a:pPr/>
+              <a:t>22</a:t>
+            </a:fld>
+            <a:endParaRPr kumimoji="0" lang="en-US" dirty="0"/>
+          </a:p>
+        </p:txBody>
+      </p:sp>
+      <p:sp>
+        <p:nvSpPr>
+          <p:cNvPr id="4" name="Content Placeholder 3">
+            <a:extLst>
+              <a:ext uri="{FF2B5EF4-FFF2-40B4-BE49-F238E27FC236}">
+                <a16:creationId xmlns:a16="http://schemas.microsoft.com/office/drawing/2014/main" id="{48170A66-2865-CBA8-EC6F-DE41161705D8}"/>
+              </a:ext>
+            </a:extLst>
+          </p:cNvPr>
+          <p:cNvSpPr>
+            <a:spLocks noGrp="1"/>
+          </p:cNvSpPr>
+          <p:nvPr>
+            <p:ph sz="quarter" idx="1"/>
+          </p:nvPr>
+        </p:nvSpPr>
+        <p:spPr/>
+        <p:txBody>
+          <a:bodyPr/>
+          <a:lstStyle/>
+          <a:p>
+            <a:endParaRPr lang="en-US"/>
+          </a:p>
+        </p:txBody>
+      </p:sp>
+      <p:pic>
+        <p:nvPicPr>
+          <p:cNvPr id="5" name="Picture 4">
+            <a:extLst>
+              <a:ext uri="{FF2B5EF4-FFF2-40B4-BE49-F238E27FC236}">
+                <a16:creationId xmlns:a16="http://schemas.microsoft.com/office/drawing/2014/main" id="{01519416-1BF0-3B98-8B01-21CB44A8CE68}"/>
+              </a:ext>
+            </a:extLst>
+          </p:cNvPr>
+          <p:cNvPicPr>
+            <a:picLocks noChangeAspect="1"/>
+          </p:cNvPicPr>
+          <p:nvPr/>
+        </p:nvPicPr>
+        <p:blipFill>
+          <a:blip r:embed="rId2"/>
+          <a:stretch>
+            <a:fillRect/>
+          </a:stretch>
+        </p:blipFill>
+        <p:spPr>
+          <a:xfrm>
+            <a:off x="1603248" y="1314485"/>
+            <a:ext cx="5029200" cy="5040310"/>
+          </a:xfrm>
+          <a:prstGeom prst="rect">
+            <a:avLst/>
+          </a:prstGeom>
+        </p:spPr>
+      </p:pic>
+    </p:spTree>
+    <p:extLst>
+      <p:ext uri="{BB962C8B-B14F-4D97-AF65-F5344CB8AC3E}">
+        <p14:creationId xmlns:p14="http://schemas.microsoft.com/office/powerpoint/2010/main" val="2402349904"/>
+      </p:ext>
+    </p:extLst>
+  </p:cSld>
+  <p:clrMapOvr>
+    <a:masterClrMapping/>
+  </p:clrMapOvr>
+  <p:timing>
+    <p:tnLst>
+      <p:par>
+        <p:cTn id="1" dur="indefinite" restart="never" nodeType="tmRoot">
+          <p:childTnLst>
+            <p:seq concurrent="1" nextAc="seek">
+              <p:cTn id="2" dur="indefinite" nodeType="mainSeq">
+                <p:childTnLst>
+                  <p:par>
+                    <p:cTn id="3" fill="hold">
+                      <p:stCondLst>
+                        <p:cond delay="indefinite"/>
+                      </p:stCondLst>
+                      <p:childTnLst>
+                        <p:par>
+                          <p:cTn id="4" fill="hold">
+                            <p:stCondLst>
+                              <p:cond delay="0"/>
+                            </p:stCondLst>
+                            <p:childTnLst>
+                              <p:par>
+                                <p:cTn id="5" presetID="1" presetClass="entr" presetSubtype="0" fill="hold" nodeType="clickEffect">
+                                  <p:stCondLst>
+                                    <p:cond delay="0"/>
+                                  </p:stCondLst>
+                                  <p:childTnLst>
+                                    <p:set>
+                                      <p:cBhvr>
+                                        <p:cTn id="6" dur="1" fill="hold">
+                                          <p:stCondLst>
+                                            <p:cond delay="0"/>
+                                          </p:stCondLst>
+                                        </p:cTn>
+                                        <p:tgtEl>
+                                          <p:spTgt spid="5"/>
+                                        </p:tgtEl>
+                                        <p:attrNameLst>
+                                          <p:attrName>style.visibility</p:attrName>
+                                        </p:attrNameLst>
+                                      </p:cBhvr>
+                                      <p:to>
+                                        <p:strVal val="visible"/>
+                                      </p:to>
+                                    </p:set>
+                                  </p:childTnLst>
+                                </p:cTn>
+                              </p:par>
+                            </p:childTnLst>
+                          </p:cTn>
+                        </p:par>
+                      </p:childTnLst>
+                    </p:cTn>
+                  </p:par>
+                </p:childTnLst>
+              </p:cTn>
+              <p:prevCondLst>
+                <p:cond evt="onPrev" delay="0">
+                  <p:tgtEl>
+                    <p:sldTgt/>
+                  </p:tgtEl>
+                </p:cond>
+              </p:prevCondLst>
+              <p:nextCondLst>
+                <p:cond evt="onNext" delay="0">
+                  <p:tgtEl>
+                    <p:sldTgt/>
+                  </p:tgtEl>
+                </p:cond>
+              </p:nextCondLst>
+            </p:seq>
+          </p:childTnLst>
+        </p:cTn>
+      </p:par>
+    </p:tnLst>
+  </p:timing>
 </p:sld>
 </file>
 
